--- a/2023/2023-08-04-Vector-Databases-Tyler.pptx
+++ b/2023/2023-08-04-Vector-Databases-Tyler.pptx
@@ -39,18 +39,11 @@
   <p:notesSz cx="6858000" cy="9144000"/>
   <p:embeddedFontLst>
     <p:embeddedFont>
-      <p:font typeface="Calibri" panose="020F0502020204030204" pitchFamily="34" charset="0"/>
+      <p:font typeface="Roboto Mono" pitchFamily="49" charset="0"/>
       <p:regular r:id="rId29"/>
       <p:bold r:id="rId30"/>
       <p:italic r:id="rId31"/>
       <p:boldItalic r:id="rId32"/>
-    </p:embeddedFont>
-    <p:embeddedFont>
-      <p:font typeface="Roboto Mono" pitchFamily="49" charset="0"/>
-      <p:regular r:id="rId33"/>
-      <p:bold r:id="rId34"/>
-      <p:italic r:id="rId35"/>
-      <p:boldItalic r:id="rId36"/>
     </p:embeddedFont>
   </p:embeddedFontLst>
   <p:defaultTextStyle>
@@ -1395,7 +1388,7 @@
         </p:nvSpPr>
         <p:spPr>
           <a:xfrm>
-            <a:off x="381300" y="685800"/>
+            <a:off x="381000" y="685800"/>
             <a:ext cx="6096000" cy="3429000"/>
           </a:xfrm>
           <a:custGeom>
@@ -11501,7 +11494,7 @@
         </p:nvGraphicFramePr>
         <p:xfrm>
           <a:off x="154500" y="853158"/>
-          <a:ext cx="3000000" cy="3000000"/>
+          <a:ext cx="8681950" cy="4196640"/>
         </p:xfrm>
         <a:graphic>
           <a:graphicData uri="http://schemas.openxmlformats.org/drawingml/2006/table">
